--- a/assets/decks/Module_08_Fish_and_Seafood.pptx
+++ b/assets/decks/Module_08_Fish_and_Seafood.pptx
@@ -8990,6 +8990,7 @@
                   <a:srgbClr val="C0392B"/>
                 </a:solidFill>
                 <a:latin typeface="Calibri"/>
+                <a:hlinkClick r:id="rId2"/>
               </a:rPr>
               <a:t>America's Test Kitchen (tested technique)</a:t>
             </a:r>
@@ -9032,6 +9033,7 @@
                   <a:srgbClr val="B5651D"/>
                 </a:solidFill>
                 <a:latin typeface="Calibri"/>
+                <a:hlinkClick r:id="rId2"/>
               </a:rPr>
               <a:t>https://www.youtube.com/@AmericasTestKitchen</a:t>
             </a:r>
@@ -9208,6 +9210,7 @@
                   <a:srgbClr val="C0392B"/>
                 </a:solidFill>
                 <a:latin typeface="Calibri"/>
+                <a:hlinkClick r:id="rId3"/>
               </a:rPr>
               <a:t>Ethan Chlebowski (the 'why' behind cooking)</a:t>
             </a:r>
@@ -9250,6 +9253,7 @@
                   <a:srgbClr val="B5651D"/>
                 </a:solidFill>
                 <a:latin typeface="Calibri"/>
+                <a:hlinkClick r:id="rId3"/>
               </a:rPr>
               <a:t>https://www.youtube.com/@EthanChlebowski</a:t>
             </a:r>
@@ -9426,6 +9430,7 @@
                   <a:srgbClr val="C0392B"/>
                 </a:solidFill>
                 <a:latin typeface="Calibri"/>
+                <a:hlinkClick r:id="rId4"/>
               </a:rPr>
               <a:t>ChefSteps (modern technique &amp; sous vide)</a:t>
             </a:r>
@@ -9468,6 +9473,7 @@
                   <a:srgbClr val="B5651D"/>
                 </a:solidFill>
                 <a:latin typeface="Calibri"/>
+                <a:hlinkClick r:id="rId4"/>
               </a:rPr>
               <a:t>https://www.youtube.com/channel/UCxD2E-bVoUbaVFL0Q3PvJTg</a:t>
             </a:r>
